--- a/Minh/glitch_poster.pptx
+++ b/Minh/glitch_poster.pptx
@@ -243,7 +243,7 @@
           <a:p>
             <a:fld id="{0318CD84-0D14-4492-9E3E-FD3916E264EE}" type="datetimeFigureOut">
               <a:rPr lang="en-US" smtClean="0"/>
-              <a:t>4/15/2026</a:t>
+              <a:t>4/16/2026</a:t>
             </a:fld>
             <a:endParaRPr lang="en-US"/>
           </a:p>
@@ -413,7 +413,7 @@
           <a:p>
             <a:fld id="{0318CD84-0D14-4492-9E3E-FD3916E264EE}" type="datetimeFigureOut">
               <a:rPr lang="en-US" smtClean="0"/>
-              <a:t>4/15/2026</a:t>
+              <a:t>4/16/2026</a:t>
             </a:fld>
             <a:endParaRPr lang="en-US"/>
           </a:p>
@@ -593,7 +593,7 @@
           <a:p>
             <a:fld id="{0318CD84-0D14-4492-9E3E-FD3916E264EE}" type="datetimeFigureOut">
               <a:rPr lang="en-US" smtClean="0"/>
-              <a:t>4/15/2026</a:t>
+              <a:t>4/16/2026</a:t>
             </a:fld>
             <a:endParaRPr lang="en-US"/>
           </a:p>
@@ -763,7 +763,7 @@
           <a:p>
             <a:fld id="{0318CD84-0D14-4492-9E3E-FD3916E264EE}" type="datetimeFigureOut">
               <a:rPr lang="en-US" smtClean="0"/>
-              <a:t>4/15/2026</a:t>
+              <a:t>4/16/2026</a:t>
             </a:fld>
             <a:endParaRPr lang="en-US"/>
           </a:p>
@@ -1009,7 +1009,7 @@
           <a:p>
             <a:fld id="{0318CD84-0D14-4492-9E3E-FD3916E264EE}" type="datetimeFigureOut">
               <a:rPr lang="en-US" smtClean="0"/>
-              <a:t>4/15/2026</a:t>
+              <a:t>4/16/2026</a:t>
             </a:fld>
             <a:endParaRPr lang="en-US"/>
           </a:p>
@@ -1241,7 +1241,7 @@
           <a:p>
             <a:fld id="{0318CD84-0D14-4492-9E3E-FD3916E264EE}" type="datetimeFigureOut">
               <a:rPr lang="en-US" smtClean="0"/>
-              <a:t>4/15/2026</a:t>
+              <a:t>4/16/2026</a:t>
             </a:fld>
             <a:endParaRPr lang="en-US"/>
           </a:p>
@@ -1608,7 +1608,7 @@
           <a:p>
             <a:fld id="{0318CD84-0D14-4492-9E3E-FD3916E264EE}" type="datetimeFigureOut">
               <a:rPr lang="en-US" smtClean="0"/>
-              <a:t>4/15/2026</a:t>
+              <a:t>4/16/2026</a:t>
             </a:fld>
             <a:endParaRPr lang="en-US"/>
           </a:p>
@@ -1726,7 +1726,7 @@
           <a:p>
             <a:fld id="{0318CD84-0D14-4492-9E3E-FD3916E264EE}" type="datetimeFigureOut">
               <a:rPr lang="en-US" smtClean="0"/>
-              <a:t>4/15/2026</a:t>
+              <a:t>4/16/2026</a:t>
             </a:fld>
             <a:endParaRPr lang="en-US"/>
           </a:p>
@@ -1821,7 +1821,7 @@
           <a:p>
             <a:fld id="{0318CD84-0D14-4492-9E3E-FD3916E264EE}" type="datetimeFigureOut">
               <a:rPr lang="en-US" smtClean="0"/>
-              <a:t>4/15/2026</a:t>
+              <a:t>4/16/2026</a:t>
             </a:fld>
             <a:endParaRPr lang="en-US"/>
           </a:p>
@@ -2098,7 +2098,7 @@
           <a:p>
             <a:fld id="{0318CD84-0D14-4492-9E3E-FD3916E264EE}" type="datetimeFigureOut">
               <a:rPr lang="en-US" smtClean="0"/>
-              <a:t>4/15/2026</a:t>
+              <a:t>4/16/2026</a:t>
             </a:fld>
             <a:endParaRPr lang="en-US"/>
           </a:p>
@@ -2355,7 +2355,7 @@
           <a:p>
             <a:fld id="{0318CD84-0D14-4492-9E3E-FD3916E264EE}" type="datetimeFigureOut">
               <a:rPr lang="en-US" smtClean="0"/>
-              <a:t>4/15/2026</a:t>
+              <a:t>4/16/2026</a:t>
             </a:fld>
             <a:endParaRPr lang="en-US"/>
           </a:p>
@@ -2568,7 +2568,7 @@
           <a:p>
             <a:fld id="{0318CD84-0D14-4492-9E3E-FD3916E264EE}" type="datetimeFigureOut">
               <a:rPr lang="en-US" smtClean="0"/>
-              <a:t>4/15/2026</a:t>
+              <a:t>4/16/2026</a:t>
             </a:fld>
             <a:endParaRPr lang="en-US"/>
           </a:p>
@@ -2989,8 +2989,8 @@
         </p:nvSpPr>
         <p:spPr>
           <a:xfrm>
-            <a:off x="-275" y="0"/>
-            <a:ext cx="30275213" cy="3688245"/>
+            <a:off x="-275" y="1"/>
+            <a:ext cx="30275213" cy="2953524"/>
           </a:xfrm>
           <a:prstGeom prst="rect">
             <a:avLst/>
@@ -3358,7 +3358,7 @@
         </p:blipFill>
         <p:spPr bwMode="auto">
           <a:xfrm>
-            <a:off x="1857790" y="8756940"/>
+            <a:off x="1857790" y="8249906"/>
             <a:ext cx="8888913" cy="3757444"/>
           </a:xfrm>
           <a:prstGeom prst="rect">
@@ -3405,7 +3405,7 @@
         </p:blipFill>
         <p:spPr bwMode="auto">
           <a:xfrm>
-            <a:off x="13600392" y="8878091"/>
+            <a:off x="13600392" y="8371057"/>
             <a:ext cx="15822732" cy="1581280"/>
           </a:xfrm>
           <a:prstGeom prst="rect">
@@ -3441,7 +3441,7 @@
         </p:nvSpPr>
         <p:spPr>
           <a:xfrm>
-            <a:off x="45445" y="1880608"/>
+            <a:off x="112613" y="1786447"/>
             <a:ext cx="30275213" cy="2151000"/>
           </a:xfrm>
           <a:prstGeom prst="rect">
@@ -3477,73 +3477,8 @@
                 <a:cs typeface="Times New Roman"/>
                 <a:sym typeface="Times New Roman"/>
               </a:rPr>
-              <a:t>Authors: Vu Thi Phuong*, Truong Hai Minh, PhD.Le Van Thuan</a:t>
-            </a:r>
-            <a:endParaRPr sz="4000" b="1" i="1">
-              <a:solidFill>
-                <a:srgbClr val="1F4E79"/>
-              </a:solidFill>
-              <a:latin typeface="Times New Roman"/>
-              <a:ea typeface="Times New Roman"/>
-              <a:cs typeface="Times New Roman"/>
-              <a:sym typeface="Times New Roman"/>
-            </a:endParaRPr>
-          </a:p>
-          <a:p>
-            <a:pPr lvl="0">
-              <a:lnSpc>
-                <a:spcPct val="100000"/>
-              </a:lnSpc>
-              <a:spcBef>
-                <a:spcPts val="0"/>
-              </a:spcBef>
-              <a:buSzPts val="2450"/>
-            </a:pPr>
-            <a:r>
-              <a:rPr lang="en-US" sz="4000" b="1" i="1">
-                <a:solidFill>
-                  <a:srgbClr val="1F4E79"/>
-                </a:solidFill>
-                <a:latin typeface="Times New Roman"/>
-                <a:ea typeface="Times New Roman"/>
-                <a:cs typeface="Times New Roman"/>
-                <a:sym typeface="Times New Roman"/>
-              </a:rPr>
-              <a:t>Affiliate</a:t>
-            </a:r>
-            <a:r>
-              <a:rPr lang="en" sz="4000" b="1" i="1">
-                <a:solidFill>
-                  <a:srgbClr val="1F4E79"/>
-                </a:solidFill>
-                <a:latin typeface="Times New Roman"/>
-                <a:ea typeface="Times New Roman"/>
-                <a:cs typeface="Times New Roman"/>
-                <a:sym typeface="Times New Roman"/>
-              </a:rPr>
-              <a:t>: </a:t>
-            </a:r>
-            <a:r>
-              <a:rPr lang="en-US" sz="4000" b="1" i="1">
-                <a:solidFill>
-                  <a:srgbClr val="1F4E79"/>
-                </a:solidFill>
-                <a:latin typeface="Times New Roman"/>
-                <a:ea typeface="Times New Roman"/>
-                <a:cs typeface="Times New Roman"/>
-                <a:sym typeface="Times New Roman"/>
-              </a:rPr>
-              <a:t>Faculty of Electrical and Electronic Engineering, Phenikaa School of Engineering, Phenikaa University</a:t>
-            </a:r>
-            <a:endParaRPr sz="4000" b="1" i="1">
-              <a:solidFill>
-                <a:srgbClr val="1F4E79"/>
-              </a:solidFill>
-              <a:latin typeface="Times New Roman"/>
-              <a:ea typeface="Times New Roman"/>
-              <a:cs typeface="Times New Roman"/>
-              <a:sym typeface="Times New Roman"/>
-            </a:endParaRPr>
+              <a:t>Authors: Vu Thi Phuong*, Truong Hai Minh</a:t>
+            </a:r>
           </a:p>
         </p:txBody>
       </p:sp>
@@ -3563,7 +3498,7 @@
         </p:nvSpPr>
         <p:spPr>
           <a:xfrm>
-            <a:off x="738782" y="3855090"/>
+            <a:off x="738782" y="3225516"/>
             <a:ext cx="28800000" cy="3299748"/>
           </a:xfrm>
           <a:prstGeom prst="rect">
@@ -3615,7 +3550,7 @@
         </p:nvSpPr>
         <p:spPr>
           <a:xfrm>
-            <a:off x="872723" y="3555981"/>
+            <a:off x="872723" y="2926407"/>
             <a:ext cx="28550401" cy="2275490"/>
           </a:xfrm>
           <a:prstGeom prst="rect">
@@ -3827,7 +3762,7 @@
         </p:nvSpPr>
         <p:spPr>
           <a:xfrm>
-            <a:off x="745720" y="4031608"/>
+            <a:off x="745720" y="3402034"/>
             <a:ext cx="28799999" cy="3123230"/>
           </a:xfrm>
           <a:prstGeom prst="rect">
@@ -4133,7 +4068,7 @@
         </p:nvSpPr>
         <p:spPr>
           <a:xfrm>
-            <a:off x="749131" y="7308727"/>
+            <a:off x="749131" y="6801693"/>
             <a:ext cx="28800000" cy="6325999"/>
           </a:xfrm>
           <a:prstGeom prst="rect">
@@ -4185,7 +4120,7 @@
         </p:nvSpPr>
         <p:spPr>
           <a:xfrm>
-            <a:off x="907851" y="6911126"/>
+            <a:off x="907851" y="6435456"/>
             <a:ext cx="28550400" cy="2455800"/>
           </a:xfrm>
           <a:prstGeom prst="rect">
@@ -4480,7 +4415,7 @@
         </p:nvSpPr>
         <p:spPr>
           <a:xfrm>
-            <a:off x="3635256" y="8094210"/>
+            <a:off x="3635256" y="7587176"/>
             <a:ext cx="5033237" cy="523220"/>
           </a:xfrm>
           <a:prstGeom prst="rect">
@@ -4524,7 +4459,7 @@
         </p:nvSpPr>
         <p:spPr>
           <a:xfrm>
-            <a:off x="18955448" y="8105233"/>
+            <a:off x="18955448" y="7598199"/>
             <a:ext cx="8267071" cy="523220"/>
           </a:xfrm>
           <a:prstGeom prst="rect">
@@ -4568,7 +4503,7 @@
         </p:nvSpPr>
         <p:spPr>
           <a:xfrm>
-            <a:off x="3394484" y="12570181"/>
+            <a:off x="3394484" y="12063147"/>
             <a:ext cx="5514779" cy="523220"/>
           </a:xfrm>
           <a:prstGeom prst="rect">
@@ -4597,8 +4532,8 @@
           </a:p>
         </p:txBody>
       </p:sp>
-      <mc:AlternateContent xmlns:mc="http://schemas.openxmlformats.org/markup-compatibility/2006" xmlns:a14="http://schemas.microsoft.com/office/drawing/2010/main">
-        <mc:Choice Requires="a14">
+      <mc:AlternateContent xmlns:mc="http://schemas.openxmlformats.org/markup-compatibility/2006">
+        <mc:Choice xmlns:a14="http://schemas.microsoft.com/office/drawing/2010/main" Requires="a14">
           <p:sp>
             <p:nvSpPr>
               <p:cNvPr id="14" name="TextBox 13">
@@ -4615,7 +4550,7 @@
             </p:nvSpPr>
             <p:spPr>
               <a:xfrm>
-                <a:off x="13600392" y="10482256"/>
+                <a:off x="13600392" y="9975222"/>
                 <a:ext cx="15743349" cy="954107"/>
               </a:xfrm>
               <a:prstGeom prst="rect">
@@ -4702,7 +4637,7 @@
             </p:txBody>
           </p:sp>
         </mc:Choice>
-        <mc:Fallback xmlns="">
+        <mc:Fallback>
           <p:sp>
             <p:nvSpPr>
               <p:cNvPr id="14" name="TextBox 13">
@@ -4719,7 +4654,7 @@
             </p:nvSpPr>
             <p:spPr>
               <a:xfrm>
-                <a:off x="13600392" y="10482256"/>
+                <a:off x="13600392" y="9975222"/>
                 <a:ext cx="15743349" cy="954107"/>
               </a:xfrm>
               <a:prstGeom prst="rect">
@@ -4728,7 +4663,7 @@
               <a:blipFill>
                 <a:blip r:embed="rId4"/>
                 <a:stretch>
-                  <a:fillRect t="-7051" b="-17308"/>
+                  <a:fillRect t="-6369" b="-16561"/>
                 </a:stretch>
               </a:blipFill>
             </p:spPr>
@@ -4761,7 +4696,7 @@
         </p:nvGrpSpPr>
         <p:grpSpPr>
           <a:xfrm>
-            <a:off x="13600393" y="11459248"/>
+            <a:off x="13600393" y="10952214"/>
             <a:ext cx="15822732" cy="1640312"/>
             <a:chOff x="13600393" y="13905013"/>
             <a:chExt cx="15822732" cy="1640312"/>
@@ -4897,7 +4832,7 @@
         </p:nvSpPr>
         <p:spPr>
           <a:xfrm>
-            <a:off x="13640083" y="13111506"/>
+            <a:off x="13640083" y="12604472"/>
             <a:ext cx="15743349" cy="523220"/>
           </a:xfrm>
           <a:prstGeom prst="rect">
@@ -4942,7 +4877,7 @@
         </p:nvSpPr>
         <p:spPr>
           <a:xfrm>
-            <a:off x="745721" y="13851660"/>
+            <a:off x="745721" y="13404321"/>
             <a:ext cx="28800000" cy="15394799"/>
           </a:xfrm>
           <a:prstGeom prst="rect">
@@ -5007,7 +4942,7 @@
         </p:blipFill>
         <p:spPr bwMode="auto">
           <a:xfrm>
-            <a:off x="3346508" y="15184341"/>
+            <a:off x="3346508" y="14737002"/>
             <a:ext cx="5923734" cy="9940026"/>
           </a:xfrm>
           <a:prstGeom prst="rect">
@@ -5041,7 +4976,7 @@
         </p:nvSpPr>
         <p:spPr>
           <a:xfrm>
-            <a:off x="6615945" y="13657611"/>
+            <a:off x="6615945" y="13210272"/>
             <a:ext cx="17134212" cy="698720"/>
           </a:xfrm>
           <a:prstGeom prst="rect">
@@ -5275,7 +5210,7 @@
         </p:blipFill>
         <p:spPr bwMode="auto">
           <a:xfrm>
-            <a:off x="11871028" y="15420240"/>
+            <a:off x="11871028" y="14972901"/>
             <a:ext cx="17674691" cy="12469494"/>
           </a:xfrm>
           <a:prstGeom prst="rect">
@@ -5307,7 +5242,7 @@
         </p:nvSpPr>
         <p:spPr>
           <a:xfrm>
-            <a:off x="1435401" y="25539022"/>
+            <a:off x="1435401" y="25091683"/>
             <a:ext cx="10361088" cy="3539430"/>
           </a:xfrm>
           <a:prstGeom prst="rect">
@@ -5376,7 +5311,7 @@
         </p:nvSpPr>
         <p:spPr>
           <a:xfrm>
-            <a:off x="2718083" y="14707491"/>
+            <a:off x="2718083" y="14260152"/>
             <a:ext cx="8116324" cy="523220"/>
           </a:xfrm>
           <a:prstGeom prst="rect">
@@ -5420,7 +5355,7 @@
         </p:nvSpPr>
         <p:spPr>
           <a:xfrm>
-            <a:off x="17797438" y="14707491"/>
+            <a:off x="17797438" y="14260152"/>
             <a:ext cx="7428637" cy="523220"/>
           </a:xfrm>
           <a:prstGeom prst="rect">
@@ -5464,7 +5399,7 @@
         </p:nvCxnSpPr>
         <p:spPr>
           <a:xfrm flipV="1">
-            <a:off x="11836039" y="14466538"/>
+            <a:off x="11836039" y="14019199"/>
             <a:ext cx="0" cy="14779921"/>
           </a:xfrm>
           <a:prstGeom prst="line">
@@ -5753,7 +5688,7 @@
                 <a:cs typeface="Times New Roman"/>
                 <a:sym typeface="Times New Roman"/>
               </a:rPr>
-              <a:t>Ha Noi, 14/04/2026</a:t>
+              <a:t>Ha Noi, 16/04/2026</a:t>
             </a:r>
             <a:endParaRPr lang="en-US" sz="3600" b="1" i="1" dirty="0">
               <a:solidFill>
@@ -5843,7 +5778,7 @@
         </p:nvSpPr>
         <p:spPr>
           <a:xfrm>
-            <a:off x="16481093" y="27906590"/>
+            <a:off x="16481093" y="27459251"/>
             <a:ext cx="9018816" cy="523220"/>
           </a:xfrm>
           <a:prstGeom prst="rect">
@@ -5900,7 +5835,7 @@
         </p:blipFill>
         <p:spPr bwMode="auto">
           <a:xfrm>
-            <a:off x="2345093" y="32372468"/>
+            <a:off x="2345093" y="32109073"/>
             <a:ext cx="10883064" cy="1560163"/>
           </a:xfrm>
           <a:prstGeom prst="rect">
@@ -5947,7 +5882,7 @@
         </p:blipFill>
         <p:spPr bwMode="auto">
           <a:xfrm>
-            <a:off x="974415" y="30636274"/>
+            <a:off x="974415" y="30372879"/>
             <a:ext cx="13889623" cy="1582305"/>
           </a:xfrm>
           <a:prstGeom prst="rect">
@@ -5981,7 +5916,7 @@
         </p:nvSpPr>
         <p:spPr>
           <a:xfrm>
-            <a:off x="858333" y="29151227"/>
+            <a:off x="858333" y="28887832"/>
             <a:ext cx="28783774" cy="2455800"/>
           </a:xfrm>
           <a:prstGeom prst="rect">
@@ -6193,7 +6128,7 @@
         </p:nvCxnSpPr>
         <p:spPr>
           <a:xfrm>
-            <a:off x="745720" y="14466538"/>
+            <a:off x="745720" y="14019199"/>
             <a:ext cx="28799999" cy="69916"/>
           </a:xfrm>
           <a:prstGeom prst="line">
@@ -6239,7 +6174,7 @@
         </p:nvCxnSpPr>
         <p:spPr>
           <a:xfrm flipV="1">
-            <a:off x="15183051" y="30065930"/>
+            <a:off x="15183051" y="29802535"/>
             <a:ext cx="15039" cy="4494220"/>
           </a:xfrm>
           <a:prstGeom prst="line">
@@ -6285,7 +6220,7 @@
         </p:nvSpPr>
         <p:spPr>
           <a:xfrm>
-            <a:off x="2226001" y="33970525"/>
+            <a:off x="2226001" y="33707130"/>
             <a:ext cx="11386450" cy="523220"/>
           </a:xfrm>
           <a:prstGeom prst="rect">
@@ -6329,7 +6264,7 @@
         </p:nvSpPr>
         <p:spPr>
           <a:xfrm>
-            <a:off x="5745713" y="30113054"/>
+            <a:off x="5745713" y="29849659"/>
             <a:ext cx="4081823" cy="523220"/>
           </a:xfrm>
           <a:prstGeom prst="rect">
@@ -6373,7 +6308,7 @@
         </p:nvSpPr>
         <p:spPr>
           <a:xfrm>
-            <a:off x="19378321" y="30113054"/>
+            <a:off x="19378321" y="29849659"/>
             <a:ext cx="5980612" cy="523220"/>
           </a:xfrm>
           <a:prstGeom prst="rect">
@@ -6417,7 +6352,7 @@
         </p:nvCxnSpPr>
         <p:spPr>
           <a:xfrm flipV="1">
-            <a:off x="11871028" y="7877085"/>
+            <a:off x="11871028" y="7370051"/>
             <a:ext cx="0" cy="5757641"/>
           </a:xfrm>
           <a:prstGeom prst="line">
@@ -6463,7 +6398,7 @@
         </p:nvCxnSpPr>
         <p:spPr>
           <a:xfrm>
-            <a:off x="760446" y="7877085"/>
+            <a:off x="760446" y="7370051"/>
             <a:ext cx="28799999" cy="69916"/>
           </a:xfrm>
           <a:prstGeom prst="line">
@@ -6509,7 +6444,7 @@
         </p:nvSpPr>
         <p:spPr>
           <a:xfrm>
-            <a:off x="16022587" y="30558685"/>
+            <a:off x="16022587" y="30295290"/>
             <a:ext cx="13004650" cy="523220"/>
           </a:xfrm>
           <a:prstGeom prst="rect">
@@ -6553,7 +6488,7 @@
         </p:nvCxnSpPr>
         <p:spPr>
           <a:xfrm>
-            <a:off x="745720" y="30030972"/>
+            <a:off x="745720" y="29767577"/>
             <a:ext cx="28799999" cy="69916"/>
           </a:xfrm>
           <a:prstGeom prst="line">
@@ -6599,7 +6534,7 @@
             </p:nvSpPr>
             <p:spPr>
               <a:xfrm>
-                <a:off x="15440656" y="33359720"/>
+                <a:off x="15440656" y="33096325"/>
                 <a:ext cx="14391878" cy="1200329"/>
               </a:xfrm>
               <a:prstGeom prst="rect">
@@ -6748,7 +6683,7 @@
             </p:nvSpPr>
             <p:spPr>
               <a:xfrm>
-                <a:off x="15440656" y="33359720"/>
+                <a:off x="15440656" y="33096325"/>
                 <a:ext cx="14391878" cy="1200329"/>
               </a:xfrm>
               <a:prstGeom prst="rect">
@@ -6792,7 +6727,7 @@
         </p:nvSpPr>
         <p:spPr>
           <a:xfrm>
-            <a:off x="781090" y="34770677"/>
+            <a:off x="781090" y="34507282"/>
             <a:ext cx="14236723" cy="4563318"/>
           </a:xfrm>
           <a:prstGeom prst="rect">
@@ -6844,7 +6779,7 @@
         </p:nvSpPr>
         <p:spPr>
           <a:xfrm>
-            <a:off x="745720" y="39520826"/>
+            <a:off x="745720" y="39257431"/>
             <a:ext cx="28829217" cy="2331926"/>
           </a:xfrm>
           <a:prstGeom prst="rect">
@@ -6896,7 +6831,7 @@
         </p:nvSpPr>
         <p:spPr>
           <a:xfrm>
-            <a:off x="3297917" y="34428353"/>
+            <a:off x="3297917" y="34164958"/>
             <a:ext cx="9301042" cy="2989775"/>
           </a:xfrm>
           <a:prstGeom prst="rect">
@@ -7108,7 +7043,7 @@
         </p:nvSpPr>
         <p:spPr>
           <a:xfrm>
-            <a:off x="745720" y="34879201"/>
+            <a:off x="745720" y="34615806"/>
             <a:ext cx="14319187" cy="3907415"/>
           </a:xfrm>
           <a:prstGeom prst="rect">
@@ -7414,7 +7349,7 @@
         </p:nvSpPr>
         <p:spPr>
           <a:xfrm>
-            <a:off x="6905236" y="39142843"/>
+            <a:off x="6905236" y="38879448"/>
             <a:ext cx="16312560" cy="1395357"/>
           </a:xfrm>
           <a:prstGeom prst="rect">
@@ -7626,7 +7561,7 @@
         </p:nvSpPr>
         <p:spPr>
           <a:xfrm>
-            <a:off x="515815" y="39475950"/>
+            <a:off x="515815" y="39212555"/>
             <a:ext cx="29059122" cy="1687468"/>
           </a:xfrm>
           <a:prstGeom prst="rect">
@@ -7992,7 +7927,7 @@
         </p:blipFill>
         <p:spPr>
           <a:xfrm>
-            <a:off x="16517152" y="31050840"/>
+            <a:off x="16517152" y="30787445"/>
             <a:ext cx="12238885" cy="2291360"/>
           </a:xfrm>
           <a:prstGeom prst="rect">
@@ -8022,7 +7957,7 @@
         </p:blipFill>
         <p:spPr>
           <a:xfrm>
-            <a:off x="16946016" y="35250814"/>
+            <a:off x="16946016" y="34987419"/>
             <a:ext cx="11381155" cy="2924180"/>
           </a:xfrm>
           <a:prstGeom prst="rect">
@@ -8046,7 +7981,7 @@
         </p:nvCxnSpPr>
         <p:spPr>
           <a:xfrm>
-            <a:off x="15198090" y="34591931"/>
+            <a:off x="15198090" y="34328536"/>
             <a:ext cx="14338341" cy="0"/>
           </a:xfrm>
           <a:prstGeom prst="line">
@@ -8092,7 +8027,7 @@
         </p:nvSpPr>
         <p:spPr>
           <a:xfrm>
-            <a:off x="19586047" y="34727594"/>
+            <a:off x="19586047" y="34464199"/>
             <a:ext cx="6101094" cy="523220"/>
           </a:xfrm>
           <a:prstGeom prst="rect">
@@ -8136,7 +8071,7 @@
         </p:nvSpPr>
         <p:spPr>
           <a:xfrm>
-            <a:off x="15033956" y="38227657"/>
+            <a:off x="15033956" y="37964262"/>
             <a:ext cx="14669342" cy="954107"/>
           </a:xfrm>
           <a:prstGeom prst="rect">
@@ -8181,7 +8116,7 @@
         </p:nvCxnSpPr>
         <p:spPr>
           <a:xfrm>
-            <a:off x="736431" y="29383444"/>
+            <a:off x="736431" y="29120049"/>
             <a:ext cx="0" cy="5252256"/>
           </a:xfrm>
           <a:prstGeom prst="line">
@@ -8226,7 +8161,7 @@
         </p:nvCxnSpPr>
         <p:spPr>
           <a:xfrm>
-            <a:off x="700275" y="29383444"/>
+            <a:off x="700275" y="29095844"/>
             <a:ext cx="28874663" cy="0"/>
           </a:xfrm>
           <a:prstGeom prst="line">
@@ -8271,7 +8206,7 @@
         </p:nvCxnSpPr>
         <p:spPr>
           <a:xfrm>
-            <a:off x="29545719" y="29359239"/>
+            <a:off x="29545719" y="29095844"/>
             <a:ext cx="0" cy="5252256"/>
           </a:xfrm>
           <a:prstGeom prst="line">
@@ -8316,7 +8251,7 @@
         </p:nvCxnSpPr>
         <p:spPr>
           <a:xfrm>
-            <a:off x="700275" y="34588324"/>
+            <a:off x="700275" y="34324929"/>
             <a:ext cx="14460170" cy="10747"/>
           </a:xfrm>
           <a:prstGeom prst="line">
@@ -8359,7 +8294,7 @@
         </p:nvGrpSpPr>
         <p:grpSpPr>
           <a:xfrm>
-            <a:off x="15137331" y="34560149"/>
+            <a:off x="15137331" y="34296754"/>
             <a:ext cx="14423114" cy="4824784"/>
             <a:chOff x="15137331" y="34974792"/>
             <a:chExt cx="14423114" cy="3536688"/>

--- a/Minh/glitch_poster.pptx
+++ b/Minh/glitch_poster.pptx
@@ -243,7 +243,7 @@
           <a:p>
             <a:fld id="{0318CD84-0D14-4492-9E3E-FD3916E264EE}" type="datetimeFigureOut">
               <a:rPr lang="en-US" smtClean="0"/>
-              <a:t>4/16/2026</a:t>
+              <a:t>4/17/2026</a:t>
             </a:fld>
             <a:endParaRPr lang="en-US"/>
           </a:p>
@@ -413,7 +413,7 @@
           <a:p>
             <a:fld id="{0318CD84-0D14-4492-9E3E-FD3916E264EE}" type="datetimeFigureOut">
               <a:rPr lang="en-US" smtClean="0"/>
-              <a:t>4/16/2026</a:t>
+              <a:t>4/17/2026</a:t>
             </a:fld>
             <a:endParaRPr lang="en-US"/>
           </a:p>
@@ -593,7 +593,7 @@
           <a:p>
             <a:fld id="{0318CD84-0D14-4492-9E3E-FD3916E264EE}" type="datetimeFigureOut">
               <a:rPr lang="en-US" smtClean="0"/>
-              <a:t>4/16/2026</a:t>
+              <a:t>4/17/2026</a:t>
             </a:fld>
             <a:endParaRPr lang="en-US"/>
           </a:p>
@@ -763,7 +763,7 @@
           <a:p>
             <a:fld id="{0318CD84-0D14-4492-9E3E-FD3916E264EE}" type="datetimeFigureOut">
               <a:rPr lang="en-US" smtClean="0"/>
-              <a:t>4/16/2026</a:t>
+              <a:t>4/17/2026</a:t>
             </a:fld>
             <a:endParaRPr lang="en-US"/>
           </a:p>
@@ -1009,7 +1009,7 @@
           <a:p>
             <a:fld id="{0318CD84-0D14-4492-9E3E-FD3916E264EE}" type="datetimeFigureOut">
               <a:rPr lang="en-US" smtClean="0"/>
-              <a:t>4/16/2026</a:t>
+              <a:t>4/17/2026</a:t>
             </a:fld>
             <a:endParaRPr lang="en-US"/>
           </a:p>
@@ -1241,7 +1241,7 @@
           <a:p>
             <a:fld id="{0318CD84-0D14-4492-9E3E-FD3916E264EE}" type="datetimeFigureOut">
               <a:rPr lang="en-US" smtClean="0"/>
-              <a:t>4/16/2026</a:t>
+              <a:t>4/17/2026</a:t>
             </a:fld>
             <a:endParaRPr lang="en-US"/>
           </a:p>
@@ -1608,7 +1608,7 @@
           <a:p>
             <a:fld id="{0318CD84-0D14-4492-9E3E-FD3916E264EE}" type="datetimeFigureOut">
               <a:rPr lang="en-US" smtClean="0"/>
-              <a:t>4/16/2026</a:t>
+              <a:t>4/17/2026</a:t>
             </a:fld>
             <a:endParaRPr lang="en-US"/>
           </a:p>
@@ -1726,7 +1726,7 @@
           <a:p>
             <a:fld id="{0318CD84-0D14-4492-9E3E-FD3916E264EE}" type="datetimeFigureOut">
               <a:rPr lang="en-US" smtClean="0"/>
-              <a:t>4/16/2026</a:t>
+              <a:t>4/17/2026</a:t>
             </a:fld>
             <a:endParaRPr lang="en-US"/>
           </a:p>
@@ -1821,7 +1821,7 @@
           <a:p>
             <a:fld id="{0318CD84-0D14-4492-9E3E-FD3916E264EE}" type="datetimeFigureOut">
               <a:rPr lang="en-US" smtClean="0"/>
-              <a:t>4/16/2026</a:t>
+              <a:t>4/17/2026</a:t>
             </a:fld>
             <a:endParaRPr lang="en-US"/>
           </a:p>
@@ -2098,7 +2098,7 @@
           <a:p>
             <a:fld id="{0318CD84-0D14-4492-9E3E-FD3916E264EE}" type="datetimeFigureOut">
               <a:rPr lang="en-US" smtClean="0"/>
-              <a:t>4/16/2026</a:t>
+              <a:t>4/17/2026</a:t>
             </a:fld>
             <a:endParaRPr lang="en-US"/>
           </a:p>
@@ -2355,7 +2355,7 @@
           <a:p>
             <a:fld id="{0318CD84-0D14-4492-9E3E-FD3916E264EE}" type="datetimeFigureOut">
               <a:rPr lang="en-US" smtClean="0"/>
-              <a:t>4/16/2026</a:t>
+              <a:t>4/17/2026</a:t>
             </a:fld>
             <a:endParaRPr lang="en-US"/>
           </a:p>
@@ -2568,7 +2568,7 @@
           <a:p>
             <a:fld id="{0318CD84-0D14-4492-9E3E-FD3916E264EE}" type="datetimeFigureOut">
               <a:rPr lang="en-US" smtClean="0"/>
-              <a:t>4/16/2026</a:t>
+              <a:t>4/17/2026</a:t>
             </a:fld>
             <a:endParaRPr lang="en-US"/>
           </a:p>
@@ -2989,8 +2989,8 @@
         </p:nvSpPr>
         <p:spPr>
           <a:xfrm>
-            <a:off x="-275" y="1"/>
-            <a:ext cx="30275213" cy="2953524"/>
+            <a:off x="-275" y="0"/>
+            <a:ext cx="30275213" cy="3487471"/>
           </a:xfrm>
           <a:prstGeom prst="rect">
             <a:avLst/>
@@ -3358,7 +3358,7 @@
         </p:blipFill>
         <p:spPr bwMode="auto">
           <a:xfrm>
-            <a:off x="1857790" y="8249906"/>
+            <a:off x="1857790" y="8521299"/>
             <a:ext cx="8888913" cy="3757444"/>
           </a:xfrm>
           <a:prstGeom prst="rect">
@@ -3405,7 +3405,7 @@
         </p:blipFill>
         <p:spPr bwMode="auto">
           <a:xfrm>
-            <a:off x="13600392" y="8371057"/>
+            <a:off x="13600392" y="8642450"/>
             <a:ext cx="15822732" cy="1581280"/>
           </a:xfrm>
           <a:prstGeom prst="rect">
@@ -3477,7 +3477,34 @@
                 <a:cs typeface="Times New Roman"/>
                 <a:sym typeface="Times New Roman"/>
               </a:rPr>
-              <a:t>Authors: Vu Thi Phuong*, Truong Hai Minh</a:t>
+              <a:t>Instructor: Dr. Le Van Thuan</a:t>
+            </a:r>
+          </a:p>
+          <a:p>
+            <a:pPr marL="0" lvl="0" indent="0" algn="ctr" rtl="0">
+              <a:lnSpc>
+                <a:spcPct val="100000"/>
+              </a:lnSpc>
+              <a:spcBef>
+                <a:spcPts val="0"/>
+              </a:spcBef>
+              <a:spcAft>
+                <a:spcPts val="0"/>
+              </a:spcAft>
+              <a:buSzPts val="2450"/>
+              <a:buNone/>
+            </a:pPr>
+            <a:r>
+              <a:rPr lang="en" sz="4000" b="1" i="1">
+                <a:solidFill>
+                  <a:srgbClr val="1F4E79"/>
+                </a:solidFill>
+                <a:latin typeface="Times New Roman"/>
+                <a:ea typeface="Times New Roman"/>
+                <a:cs typeface="Times New Roman"/>
+                <a:sym typeface="Times New Roman"/>
+              </a:rPr>
+              <a:t>Students: Vu Thi Phuong*, Truong Hai Minh</a:t>
             </a:r>
           </a:p>
         </p:txBody>
@@ -3498,7 +3525,7 @@
         </p:nvSpPr>
         <p:spPr>
           <a:xfrm>
-            <a:off x="738782" y="3225516"/>
+            <a:off x="738782" y="3626981"/>
             <a:ext cx="28800000" cy="3299748"/>
           </a:xfrm>
           <a:prstGeom prst="rect">
@@ -3550,7 +3577,7 @@
         </p:nvSpPr>
         <p:spPr>
           <a:xfrm>
-            <a:off x="872723" y="2926407"/>
+            <a:off x="872723" y="3363847"/>
             <a:ext cx="28550401" cy="2275490"/>
           </a:xfrm>
           <a:prstGeom prst="rect">
@@ -3762,7 +3789,7 @@
         </p:nvSpPr>
         <p:spPr>
           <a:xfrm>
-            <a:off x="745720" y="3402034"/>
+            <a:off x="745720" y="3803499"/>
             <a:ext cx="28799999" cy="3123230"/>
           </a:xfrm>
           <a:prstGeom prst="rect">
@@ -4068,7 +4095,7 @@
         </p:nvSpPr>
         <p:spPr>
           <a:xfrm>
-            <a:off x="749131" y="6801693"/>
+            <a:off x="749131" y="7073086"/>
             <a:ext cx="28800000" cy="6325999"/>
           </a:xfrm>
           <a:prstGeom prst="rect">
@@ -4120,7 +4147,7 @@
         </p:nvSpPr>
         <p:spPr>
           <a:xfrm>
-            <a:off x="907851" y="6435456"/>
+            <a:off x="907851" y="6706849"/>
             <a:ext cx="28550400" cy="2455800"/>
           </a:xfrm>
           <a:prstGeom prst="rect">
@@ -4415,7 +4442,7 @@
         </p:nvSpPr>
         <p:spPr>
           <a:xfrm>
-            <a:off x="3635256" y="7587176"/>
+            <a:off x="3635256" y="7858569"/>
             <a:ext cx="5033237" cy="523220"/>
           </a:xfrm>
           <a:prstGeom prst="rect">
@@ -4459,7 +4486,7 @@
         </p:nvSpPr>
         <p:spPr>
           <a:xfrm>
-            <a:off x="18955448" y="7598199"/>
+            <a:off x="18955448" y="7869592"/>
             <a:ext cx="8267071" cy="523220"/>
           </a:xfrm>
           <a:prstGeom prst="rect">
@@ -4503,7 +4530,7 @@
         </p:nvSpPr>
         <p:spPr>
           <a:xfrm>
-            <a:off x="3394484" y="12063147"/>
+            <a:off x="3394484" y="12334540"/>
             <a:ext cx="5514779" cy="523220"/>
           </a:xfrm>
           <a:prstGeom prst="rect">
@@ -4532,8 +4559,8 @@
           </a:p>
         </p:txBody>
       </p:sp>
-      <mc:AlternateContent xmlns:mc="http://schemas.openxmlformats.org/markup-compatibility/2006">
-        <mc:Choice xmlns:a14="http://schemas.microsoft.com/office/drawing/2010/main" Requires="a14">
+      <mc:AlternateContent xmlns:mc="http://schemas.openxmlformats.org/markup-compatibility/2006" xmlns:a14="http://schemas.microsoft.com/office/drawing/2010/main">
+        <mc:Choice Requires="a14">
           <p:sp>
             <p:nvSpPr>
               <p:cNvPr id="14" name="TextBox 13">
@@ -4550,7 +4577,7 @@
             </p:nvSpPr>
             <p:spPr>
               <a:xfrm>
-                <a:off x="13600392" y="9975222"/>
+                <a:off x="13600392" y="10246615"/>
                 <a:ext cx="15743349" cy="954107"/>
               </a:xfrm>
               <a:prstGeom prst="rect">
@@ -4637,7 +4664,7 @@
             </p:txBody>
           </p:sp>
         </mc:Choice>
-        <mc:Fallback>
+        <mc:Fallback xmlns="">
           <p:sp>
             <p:nvSpPr>
               <p:cNvPr id="14" name="TextBox 13">
@@ -4654,7 +4681,7 @@
             </p:nvSpPr>
             <p:spPr>
               <a:xfrm>
-                <a:off x="13600392" y="9975222"/>
+                <a:off x="13600392" y="10246615"/>
                 <a:ext cx="15743349" cy="954107"/>
               </a:xfrm>
               <a:prstGeom prst="rect">
@@ -4663,7 +4690,7 @@
               <a:blipFill>
                 <a:blip r:embed="rId4"/>
                 <a:stretch>
-                  <a:fillRect t="-6369" b="-16561"/>
+                  <a:fillRect t="-7051" b="-17308"/>
                 </a:stretch>
               </a:blipFill>
             </p:spPr>
@@ -4696,7 +4723,7 @@
         </p:nvGrpSpPr>
         <p:grpSpPr>
           <a:xfrm>
-            <a:off x="13600393" y="10952214"/>
+            <a:off x="13600393" y="11223607"/>
             <a:ext cx="15822732" cy="1640312"/>
             <a:chOff x="13600393" y="13905013"/>
             <a:chExt cx="15822732" cy="1640312"/>
@@ -4832,7 +4859,7 @@
         </p:nvSpPr>
         <p:spPr>
           <a:xfrm>
-            <a:off x="13640083" y="12604472"/>
+            <a:off x="13640083" y="12875865"/>
             <a:ext cx="15743349" cy="523220"/>
           </a:xfrm>
           <a:prstGeom prst="rect">
@@ -4877,7 +4904,7 @@
         </p:nvSpPr>
         <p:spPr>
           <a:xfrm>
-            <a:off x="745721" y="13404321"/>
+            <a:off x="745721" y="13553644"/>
             <a:ext cx="28800000" cy="15394799"/>
           </a:xfrm>
           <a:prstGeom prst="rect">
@@ -4942,7 +4969,7 @@
         </p:blipFill>
         <p:spPr bwMode="auto">
           <a:xfrm>
-            <a:off x="3346508" y="14737002"/>
+            <a:off x="3346508" y="14886325"/>
             <a:ext cx="5923734" cy="9940026"/>
           </a:xfrm>
           <a:prstGeom prst="rect">
@@ -4976,7 +5003,7 @@
         </p:nvSpPr>
         <p:spPr>
           <a:xfrm>
-            <a:off x="6615945" y="13210272"/>
+            <a:off x="6615945" y="13359595"/>
             <a:ext cx="17134212" cy="698720"/>
           </a:xfrm>
           <a:prstGeom prst="rect">
@@ -5210,7 +5237,7 @@
         </p:blipFill>
         <p:spPr bwMode="auto">
           <a:xfrm>
-            <a:off x="11871028" y="14972901"/>
+            <a:off x="11871028" y="15122224"/>
             <a:ext cx="17674691" cy="12469494"/>
           </a:xfrm>
           <a:prstGeom prst="rect">
@@ -5242,7 +5269,7 @@
         </p:nvSpPr>
         <p:spPr>
           <a:xfrm>
-            <a:off x="1435401" y="25091683"/>
+            <a:off x="1435401" y="25241006"/>
             <a:ext cx="10361088" cy="3539430"/>
           </a:xfrm>
           <a:prstGeom prst="rect">
@@ -5311,7 +5338,7 @@
         </p:nvSpPr>
         <p:spPr>
           <a:xfrm>
-            <a:off x="2718083" y="14260152"/>
+            <a:off x="2718083" y="14409475"/>
             <a:ext cx="8116324" cy="523220"/>
           </a:xfrm>
           <a:prstGeom prst="rect">
@@ -5355,7 +5382,7 @@
         </p:nvSpPr>
         <p:spPr>
           <a:xfrm>
-            <a:off x="17797438" y="14260152"/>
+            <a:off x="17797438" y="14409475"/>
             <a:ext cx="7428637" cy="523220"/>
           </a:xfrm>
           <a:prstGeom prst="rect">
@@ -5399,7 +5426,7 @@
         </p:nvCxnSpPr>
         <p:spPr>
           <a:xfrm flipV="1">
-            <a:off x="11836039" y="14019199"/>
+            <a:off x="11836039" y="14168522"/>
             <a:ext cx="0" cy="14779921"/>
           </a:xfrm>
           <a:prstGeom prst="line">
@@ -5754,7 +5781,7 @@
         </p:blipFill>
         <p:spPr>
           <a:xfrm>
-            <a:off x="-7951" y="293750"/>
+            <a:off x="234625" y="293750"/>
             <a:ext cx="3736564" cy="2562661"/>
           </a:xfrm>
           <a:prstGeom prst="rect">
@@ -5778,7 +5805,7 @@
         </p:nvSpPr>
         <p:spPr>
           <a:xfrm>
-            <a:off x="16481093" y="27459251"/>
+            <a:off x="16481093" y="27608574"/>
             <a:ext cx="9018816" cy="523220"/>
           </a:xfrm>
           <a:prstGeom prst="rect">
@@ -6128,7 +6155,7 @@
         </p:nvCxnSpPr>
         <p:spPr>
           <a:xfrm>
-            <a:off x="745720" y="14019199"/>
+            <a:off x="745720" y="14168522"/>
             <a:ext cx="28799999" cy="69916"/>
           </a:xfrm>
           <a:prstGeom prst="line">
@@ -6352,7 +6379,7 @@
         </p:nvCxnSpPr>
         <p:spPr>
           <a:xfrm flipV="1">
-            <a:off x="11871028" y="7370051"/>
+            <a:off x="11871028" y="7641444"/>
             <a:ext cx="0" cy="5757641"/>
           </a:xfrm>
           <a:prstGeom prst="line">
@@ -6398,7 +6425,7 @@
         </p:nvCxnSpPr>
         <p:spPr>
           <a:xfrm>
-            <a:off x="760446" y="7370051"/>
+            <a:off x="760446" y="7641444"/>
             <a:ext cx="28799999" cy="69916"/>
           </a:xfrm>
           <a:prstGeom prst="line">
@@ -6518,8 +6545,8 @@
           </a:fontRef>
         </p:style>
       </p:cxnSp>
-      <mc:AlternateContent xmlns:mc="http://schemas.openxmlformats.org/markup-compatibility/2006">
-        <mc:Choice xmlns:a14="http://schemas.microsoft.com/office/drawing/2010/main" Requires="a14">
+      <mc:AlternateContent xmlns:mc="http://schemas.openxmlformats.org/markup-compatibility/2006" xmlns:a14="http://schemas.microsoft.com/office/drawing/2010/main">
+        <mc:Choice Requires="a14">
           <p:sp>
             <p:nvSpPr>
               <p:cNvPr id="1092" name="TextBox 1091">
@@ -6666,7 +6693,7 @@
             </p:txBody>
           </p:sp>
         </mc:Choice>
-        <mc:Fallback>
+        <mc:Fallback xmlns="">
           <p:sp>
             <p:nvSpPr>
               <p:cNvPr id="1092" name="TextBox 1091">
